--- a/topic07-methods/unit-1/talk-0-methods-terminology/a-methods-terminology..pptx
+++ b/topic07-methods/unit-1/talk-0-methods-terminology/a-methods-terminology..pptx
@@ -226,7 +226,7 @@
           <a:p>
             <a:fld id="{58C3D141-1E1C-433C-AD3A-CD56CBBB4F9F}" type="datetimeFigureOut">
               <a:rPr lang="en-IE" smtClean="0"/>
-              <a:t>30/10/2025</a:t>
+              <a:t>03/11/2025</a:t>
             </a:fld>
             <a:endParaRPr lang="en-IE"/>
           </a:p>
@@ -1413,7 +1413,7 @@
             <a:fld id="{1D8BD707-D9CF-40AE-B4C6-C98DA3205C09}" type="datetimeFigureOut">
               <a:rPr lang="en-US" smtClean="0"/>
               <a:pPr/>
-              <a:t>10/30/25</a:t>
+              <a:t>11/3/25</a:t>
             </a:fld>
             <a:endParaRPr lang="en-US"/>
           </a:p>
@@ -1585,7 +1585,7 @@
             <a:fld id="{1D8BD707-D9CF-40AE-B4C6-C98DA3205C09}" type="datetimeFigureOut">
               <a:rPr lang="en-US" smtClean="0"/>
               <a:pPr/>
-              <a:t>10/30/25</a:t>
+              <a:t>11/3/25</a:t>
             </a:fld>
             <a:endParaRPr lang="en-US"/>
           </a:p>
@@ -1767,7 +1767,7 @@
             <a:fld id="{1D8BD707-D9CF-40AE-B4C6-C98DA3205C09}" type="datetimeFigureOut">
               <a:rPr lang="en-US" smtClean="0"/>
               <a:pPr/>
-              <a:t>10/30/25</a:t>
+              <a:t>11/3/25</a:t>
             </a:fld>
             <a:endParaRPr lang="en-US"/>
           </a:p>
@@ -2500,7 +2500,7 @@
             <a:fld id="{1D8BD707-D9CF-40AE-B4C6-C98DA3205C09}" type="datetimeFigureOut">
               <a:rPr lang="en-US" smtClean="0"/>
               <a:pPr/>
-              <a:t>10/30/25</a:t>
+              <a:t>11/3/25</a:t>
             </a:fld>
             <a:endParaRPr lang="en-US"/>
           </a:p>
@@ -3006,7 +3006,7 @@
             <a:fld id="{1D8BD707-D9CF-40AE-B4C6-C98DA3205C09}" type="datetimeFigureOut">
               <a:rPr lang="en-US" smtClean="0"/>
               <a:pPr/>
-              <a:t>10/30/25</a:t>
+              <a:t>11/3/25</a:t>
             </a:fld>
             <a:endParaRPr lang="en-US"/>
           </a:p>
@@ -3307,7 +3307,7 @@
             <a:fld id="{1D8BD707-D9CF-40AE-B4C6-C98DA3205C09}" type="datetimeFigureOut">
               <a:rPr lang="en-US" smtClean="0"/>
               <a:pPr/>
-              <a:t>10/30/25</a:t>
+              <a:t>11/3/25</a:t>
             </a:fld>
             <a:endParaRPr lang="en-US"/>
           </a:p>
@@ -3978,7 +3978,7 @@
             <a:fld id="{1D8BD707-D9CF-40AE-B4C6-C98DA3205C09}" type="datetimeFigureOut">
               <a:rPr lang="en-US" smtClean="0"/>
               <a:pPr/>
-              <a:t>10/30/25</a:t>
+              <a:t>11/3/25</a:t>
             </a:fld>
             <a:endParaRPr lang="en-US"/>
           </a:p>
@@ -4308,7 +4308,7 @@
             <a:fld id="{1D8BD707-D9CF-40AE-B4C6-C98DA3205C09}" type="datetimeFigureOut">
               <a:rPr lang="en-US" smtClean="0"/>
               <a:pPr/>
-              <a:t>10/30/25</a:t>
+              <a:t>11/3/25</a:t>
             </a:fld>
             <a:endParaRPr lang="en-US"/>
           </a:p>
@@ -4645,7 +4645,7 @@
             <a:fld id="{1D8BD707-D9CF-40AE-B4C6-C98DA3205C09}" type="datetimeFigureOut">
               <a:rPr lang="en-US" smtClean="0"/>
               <a:pPr/>
-              <a:t>10/30/25</a:t>
+              <a:t>11/3/25</a:t>
             </a:fld>
             <a:endParaRPr lang="en-US"/>
           </a:p>
@@ -4924,7 +4924,7 @@
             <a:fld id="{1D8BD707-D9CF-40AE-B4C6-C98DA3205C09}" type="datetimeFigureOut">
               <a:rPr lang="en-US" smtClean="0"/>
               <a:pPr/>
-              <a:t>10/30/25</a:t>
+              <a:t>11/3/25</a:t>
             </a:fld>
             <a:endParaRPr lang="en-US"/>
           </a:p>
@@ -5183,7 +5183,7 @@
             <a:fld id="{1D8BD707-D9CF-40AE-B4C6-C98DA3205C09}" type="datetimeFigureOut">
               <a:rPr lang="en-US" smtClean="0"/>
               <a:pPr/>
-              <a:t>10/30/25</a:t>
+              <a:t>11/3/25</a:t>
             </a:fld>
             <a:endParaRPr lang="en-US"/>
           </a:p>
@@ -5403,7 +5403,7 @@
             <a:fld id="{1D8BD707-D9CF-40AE-B4C6-C98DA3205C09}" type="datetimeFigureOut">
               <a:rPr lang="en-US" smtClean="0"/>
               <a:pPr/>
-              <a:t>10/30/25</a:t>
+              <a:t>11/3/25</a:t>
             </a:fld>
             <a:endParaRPr lang="en-US"/>
           </a:p>
@@ -6925,8 +6925,8 @@
         </p:nvSpPr>
         <p:spPr>
           <a:xfrm>
-            <a:off x="1524000" y="3530601"/>
-            <a:ext cx="3556000" cy="757831"/>
+            <a:off x="2619546" y="3530601"/>
+            <a:ext cx="2460454" cy="757831"/>
           </a:xfrm>
           <a:prstGeom prst="frame">
             <a:avLst>
@@ -10784,140 +10784,6 @@
                                         <p:tgtEl>
                                           <p:spTgt spid="3">
                                             <p:txEl>
-                                              <p:pRg st="0" end="0"/>
-                                            </p:txEl>
-                                          </p:spTgt>
-                                        </p:tgtEl>
-                                        <p:attrNameLst>
-                                          <p:attrName>style.visibility</p:attrName>
-                                        </p:attrNameLst>
-                                      </p:cBhvr>
-                                      <p:to>
-                                        <p:strVal val="visible"/>
-                                      </p:to>
-                                    </p:set>
-                                  </p:childTnLst>
-                                </p:cTn>
-                              </p:par>
-                              <p:par>
-                                <p:cTn id="7" presetID="1" presetClass="entr" presetSubtype="0" fill="hold" grpId="0" nodeType="withEffect">
-                                  <p:stCondLst>
-                                    <p:cond delay="0"/>
-                                  </p:stCondLst>
-                                  <p:childTnLst>
-                                    <p:set>
-                                      <p:cBhvr>
-                                        <p:cTn id="8" dur="1" fill="hold">
-                                          <p:stCondLst>
-                                            <p:cond delay="0"/>
-                                          </p:stCondLst>
-                                        </p:cTn>
-                                        <p:tgtEl>
-                                          <p:spTgt spid="3">
-                                            <p:txEl>
-                                              <p:pRg st="1" end="1"/>
-                                            </p:txEl>
-                                          </p:spTgt>
-                                        </p:tgtEl>
-                                        <p:attrNameLst>
-                                          <p:attrName>style.visibility</p:attrName>
-                                        </p:attrNameLst>
-                                      </p:cBhvr>
-                                      <p:to>
-                                        <p:strVal val="visible"/>
-                                      </p:to>
-                                    </p:set>
-                                  </p:childTnLst>
-                                </p:cTn>
-                              </p:par>
-                              <p:par>
-                                <p:cTn id="9" presetID="1" presetClass="entr" presetSubtype="0" fill="hold" nodeType="withEffect">
-                                  <p:stCondLst>
-                                    <p:cond delay="0"/>
-                                  </p:stCondLst>
-                                  <p:childTnLst>
-                                    <p:set>
-                                      <p:cBhvr>
-                                        <p:cTn id="10" dur="1" fill="hold">
-                                          <p:stCondLst>
-                                            <p:cond delay="0"/>
-                                          </p:stCondLst>
-                                        </p:cTn>
-                                        <p:tgtEl>
-                                          <p:spTgt spid="7"/>
-                                        </p:tgtEl>
-                                        <p:attrNameLst>
-                                          <p:attrName>style.visibility</p:attrName>
-                                        </p:attrNameLst>
-                                      </p:cBhvr>
-                                      <p:to>
-                                        <p:strVal val="visible"/>
-                                      </p:to>
-                                    </p:set>
-                                  </p:childTnLst>
-                                </p:cTn>
-                              </p:par>
-                              <p:par>
-                                <p:cTn id="11" presetID="1" presetClass="entr" presetSubtype="0" fill="hold" nodeType="withEffect">
-                                  <p:stCondLst>
-                                    <p:cond delay="0"/>
-                                  </p:stCondLst>
-                                  <p:childTnLst>
-                                    <p:set>
-                                      <p:cBhvr>
-                                        <p:cTn id="12" dur="1" fill="hold">
-                                          <p:stCondLst>
-                                            <p:cond delay="0"/>
-                                          </p:stCondLst>
-                                        </p:cTn>
-                                        <p:tgtEl>
-                                          <p:spTgt spid="10"/>
-                                        </p:tgtEl>
-                                        <p:attrNameLst>
-                                          <p:attrName>style.visibility</p:attrName>
-                                        </p:attrNameLst>
-                                      </p:cBhvr>
-                                      <p:to>
-                                        <p:strVal val="visible"/>
-                                      </p:to>
-                                    </p:set>
-                                  </p:childTnLst>
-                                </p:cTn>
-                              </p:par>
-                            </p:childTnLst>
-                          </p:cTn>
-                        </p:par>
-                      </p:childTnLst>
-                    </p:cTn>
-                  </p:par>
-                  <p:par>
-                    <p:cTn id="13" fill="hold">
-                      <p:stCondLst>
-                        <p:cond delay="indefinite"/>
-                      </p:stCondLst>
-                      <p:childTnLst>
-                        <p:par>
-                          <p:cTn id="14" fill="hold">
-                            <p:stCondLst>
-                              <p:cond delay="0"/>
-                            </p:stCondLst>
-                            <p:childTnLst>
-                              <p:par>
-                                <p:cTn id="15" presetID="1" presetClass="entr" presetSubtype="0" fill="hold" grpId="0" nodeType="clickEffect">
-                                  <p:stCondLst>
-                                    <p:cond delay="0"/>
-                                  </p:stCondLst>
-                                  <p:childTnLst>
-                                    <p:set>
-                                      <p:cBhvr>
-                                        <p:cTn id="16" dur="1" fill="hold">
-                                          <p:stCondLst>
-                                            <p:cond delay="0"/>
-                                          </p:stCondLst>
-                                        </p:cTn>
-                                        <p:tgtEl>
-                                          <p:spTgt spid="3">
-                                            <p:txEl>
                                               <p:pRg st="2" end="2"/>
                                             </p:txEl>
                                           </p:spTgt>
@@ -10940,26 +10806,26 @@
                     </p:cTn>
                   </p:par>
                   <p:par>
-                    <p:cTn id="17" fill="hold">
+                    <p:cTn id="7" fill="hold">
                       <p:stCondLst>
                         <p:cond delay="indefinite"/>
                       </p:stCondLst>
                       <p:childTnLst>
                         <p:par>
-                          <p:cTn id="18" fill="hold">
+                          <p:cTn id="8" fill="hold">
                             <p:stCondLst>
                               <p:cond delay="0"/>
                             </p:stCondLst>
                             <p:childTnLst>
                               <p:par>
-                                <p:cTn id="19" presetID="1" presetClass="entr" presetSubtype="0" fill="hold" grpId="0" nodeType="clickEffect">
+                                <p:cTn id="9" presetID="1" presetClass="entr" presetSubtype="0" fill="hold" grpId="0" nodeType="clickEffect">
                                   <p:stCondLst>
                                     <p:cond delay="0"/>
                                   </p:stCondLst>
                                   <p:childTnLst>
                                     <p:set>
                                       <p:cBhvr>
-                                        <p:cTn id="20" dur="1" fill="hold">
+                                        <p:cTn id="10" dur="1" fill="hold">
                                           <p:stCondLst>
                                             <p:cond delay="0"/>
                                           </p:stCondLst>
@@ -10989,26 +10855,26 @@
                     </p:cTn>
                   </p:par>
                   <p:par>
-                    <p:cTn id="21" fill="hold">
+                    <p:cTn id="11" fill="hold">
                       <p:stCondLst>
                         <p:cond delay="indefinite"/>
                       </p:stCondLst>
                       <p:childTnLst>
                         <p:par>
-                          <p:cTn id="22" fill="hold">
+                          <p:cTn id="12" fill="hold">
                             <p:stCondLst>
                               <p:cond delay="0"/>
                             </p:stCondLst>
                             <p:childTnLst>
                               <p:par>
-                                <p:cTn id="23" presetID="1" presetClass="entr" presetSubtype="0" fill="hold" grpId="0" nodeType="clickEffect">
+                                <p:cTn id="13" presetID="1" presetClass="entr" presetSubtype="0" fill="hold" grpId="0" nodeType="clickEffect">
                                   <p:stCondLst>
                                     <p:cond delay="0"/>
                                   </p:stCondLst>
                                   <p:childTnLst>
                                     <p:set>
                                       <p:cBhvr>
-                                        <p:cTn id="24" dur="1" fill="hold">
+                                        <p:cTn id="14" dur="1" fill="hold">
                                           <p:stCondLst>
                                             <p:cond delay="0"/>
                                           </p:stCondLst>
@@ -11038,26 +10904,26 @@
                     </p:cTn>
                   </p:par>
                   <p:par>
-                    <p:cTn id="25" fill="hold">
+                    <p:cTn id="15" fill="hold">
                       <p:stCondLst>
                         <p:cond delay="indefinite"/>
                       </p:stCondLst>
                       <p:childTnLst>
                         <p:par>
-                          <p:cTn id="26" fill="hold">
+                          <p:cTn id="16" fill="hold">
                             <p:stCondLst>
                               <p:cond delay="0"/>
                             </p:stCondLst>
                             <p:childTnLst>
                               <p:par>
-                                <p:cTn id="27" presetID="1" presetClass="entr" presetSubtype="0" fill="hold" grpId="0" nodeType="clickEffect">
+                                <p:cTn id="17" presetID="1" presetClass="entr" presetSubtype="0" fill="hold" grpId="0" nodeType="clickEffect">
                                   <p:stCondLst>
                                     <p:cond delay="0"/>
                                   </p:stCondLst>
                                   <p:childTnLst>
                                     <p:set>
                                       <p:cBhvr>
-                                        <p:cTn id="28" dur="1" fill="hold">
+                                        <p:cTn id="18" dur="1" fill="hold">
                                           <p:stCondLst>
                                             <p:cond delay="0"/>
                                           </p:stCondLst>
@@ -13159,7 +13025,7 @@
         </p:nvSpPr>
         <p:spPr>
           <a:xfrm>
-            <a:off x="4893551" y="2803230"/>
+            <a:off x="4903489" y="2670158"/>
             <a:ext cx="118899" cy="523220"/>
           </a:xfrm>
           <a:prstGeom prst="leftBracket">
@@ -13202,8 +13068,8 @@
         </p:nvSpPr>
         <p:spPr>
           <a:xfrm>
-            <a:off x="4899792" y="3469413"/>
-            <a:ext cx="172107" cy="1712188"/>
+            <a:off x="4899791" y="3278604"/>
+            <a:ext cx="222361" cy="1308512"/>
           </a:xfrm>
           <a:prstGeom prst="leftBracket">
             <a:avLst/>
@@ -13250,7 +13116,7 @@
         <p:spPr>
           <a:xfrm>
             <a:off x="2797723" y="2352021"/>
-            <a:ext cx="2095828" cy="712819"/>
+            <a:ext cx="2105766" cy="579747"/>
           </a:xfrm>
           <a:prstGeom prst="straightConnector1">
             <a:avLst/>
@@ -13288,9 +13154,9 @@
           <p:nvPr/>
         </p:nvCxnSpPr>
         <p:spPr>
-          <a:xfrm>
-            <a:off x="3352800" y="4310117"/>
-            <a:ext cx="1546992" cy="15390"/>
+          <a:xfrm flipV="1">
+            <a:off x="3352800" y="3932860"/>
+            <a:ext cx="1546991" cy="377257"/>
           </a:xfrm>
           <a:prstGeom prst="straightConnector1">
             <a:avLst/>
@@ -14028,58 +13894,6 @@
           </a:fontRef>
         </p:style>
       </p:cxnSp>
-      <p:sp>
-        <p:nvSpPr>
-          <p:cNvPr id="9" name="Oval 8">
-            <a:extLst>
-              <a:ext uri="{FF2B5EF4-FFF2-40B4-BE49-F238E27FC236}">
-                <a16:creationId xmlns:a16="http://schemas.microsoft.com/office/drawing/2014/main" id="{2A88CD8A-1860-EFE1-2C75-3473CE37E301}"/>
-              </a:ext>
-            </a:extLst>
-          </p:cNvPr>
-          <p:cNvSpPr/>
-          <p:nvPr/>
-        </p:nvSpPr>
-        <p:spPr>
-          <a:xfrm>
-            <a:off x="7574517" y="2178682"/>
-            <a:ext cx="2514600" cy="838200"/>
-          </a:xfrm>
-          <a:prstGeom prst="ellipse">
-            <a:avLst/>
-          </a:prstGeom>
-          <a:noFill/>
-          <a:ln>
-            <a:solidFill>
-              <a:srgbClr val="FF0000"/>
-            </a:solidFill>
-          </a:ln>
-        </p:spPr>
-        <p:style>
-          <a:lnRef idx="2">
-            <a:schemeClr val="accent1">
-              <a:shade val="15000"/>
-            </a:schemeClr>
-          </a:lnRef>
-          <a:fillRef idx="1">
-            <a:schemeClr val="accent1"/>
-          </a:fillRef>
-          <a:effectRef idx="0">
-            <a:schemeClr val="accent1"/>
-          </a:effectRef>
-          <a:fontRef idx="minor">
-            <a:schemeClr val="lt1"/>
-          </a:fontRef>
-        </p:style>
-        <p:txBody>
-          <a:bodyPr rtlCol="0" anchor="ctr"/>
-          <a:lstStyle/>
-          <a:p>
-            <a:pPr algn="ctr"/>
-            <a:endParaRPr lang="en-IE"/>
-          </a:p>
-        </p:txBody>
-      </p:sp>
     </p:spTree>
     <p:extLst>
       <p:ext uri="{BB962C8B-B14F-4D97-AF65-F5344CB8AC3E}">
